--- a/dist/초2/국어/대화와매체/초2_국어_대화와매체_01_듣고질문하기.pptx
+++ b/dist/초2/국어/대화와매체/초2_국어_대화와매체_01_듣고질문하기.pptx
@@ -119,39 +119,39 @@
   <p:extLst>
     <p:ext uri="{521415D9-36F7-43E2-AB2F-B90AF26B5E84}">
       <p14:sectionLst xmlns:p14="http://schemas.microsoft.com/office/powerpoint/2010/main">
-        <p14:section name="도입" id="{113f14da-e84c-c2f5-b578-602f64b3d0ef}">
+        <p14:section name="도입" id="{3be47d02-a80e-4105-dc67-4b9b10c81f1e}">
           <p14:sldIdLst>
             <p14:sldId id="256"/>
             <p14:sldId id="257"/>
           </p14:sldIdLst>
         </p14:section>
-        <p14:section name="개념" id="{432fbab0-acbd-2b81-b99b-200061997738}">
+        <p14:section name="개념" id="{892389f9-35e2-ec44-86c9-4845195462fe}">
           <p14:sldIdLst>
             <p14:sldId id="258"/>
             <p14:sldId id="259"/>
             <p14:sldId id="260"/>
           </p14:sldIdLst>
         </p14:section>
-        <p14:section name="연습" id="{4cfc8c48-0ea8-0f01-ef63-16481f1d5c5a}">
+        <p14:section name="연습" id="{30b4df31-2eda-0b49-dfa1-3b6fcaf50a82}">
           <p14:sldIdLst>
             <p14:sldId id="261"/>
             <p14:sldId id="262"/>
             <p14:sldId id="263"/>
           </p14:sldIdLst>
         </p14:section>
-        <p14:section name="확인" id="{74e41c6a-cd79-8408-b333-af2f510351e9}">
+        <p14:section name="확인" id="{ec3b16d9-dc48-e9ee-7325-ef2fbe2091f1}">
           <p14:sldIdLst>
             <p14:sldId id="264"/>
             <p14:sldId id="265"/>
             <p14:sldId id="266"/>
           </p14:sldIdLst>
         </p14:section>
-        <p14:section name="정리" id="{4bfebf25-c5f2-ea66-dfe4-880cc74500bd}">
+        <p14:section name="정리" id="{b2e4d11c-1fc2-2f76-2424-7bf162938f42}">
           <p14:sldIdLst>
             <p14:sldId id="267"/>
           </p14:sldIdLst>
         </p14:section>
-        <p14:section name="보충" id="{e02ff938-f387-2ff5-8ca4-8ec22cd359be}">
+        <p14:section name="보충" id="{d7b084d3-a9dd-841d-0279-e8bc9dabb7ba}">
           <p14:sldIdLst>
             <p14:sldId id="268"/>
           </p14:sldIdLst>
@@ -1270,7 +1270,7 @@
 막히면
 - 부모가 2번의 말을 먼저 해 주고 아이는 4번만 하게 합니다.
 주의
-- 아이의 질문에는 짧게 지어서 답해 주어도 됩니다(예: “경비 아저씨가 우유를 주셨어.”).</a:t>
+- 아이의 질문에는 짧게 지어서 답해 주어도 됩니다(예: “조금 뒤에 엄마 고양이가 와서 데려갔어.”).</a:t>
             </a:r>
             <a:endParaRPr lang="en-US" dirty="0"/>
           </a:p>

--- a/dist/초2/국어/대화와매체/초2_국어_대화와매체_01_듣고질문하기.pptx
+++ b/dist/초2/국어/대화와매체/초2_국어_대화와매체_01_듣고질문하기.pptx
@@ -119,39 +119,39 @@
   <p:extLst>
     <p:ext uri="{521415D9-36F7-43E2-AB2F-B90AF26B5E84}">
       <p14:sectionLst xmlns:p14="http://schemas.microsoft.com/office/powerpoint/2010/main">
-        <p14:section name="도입" id="{3be47d02-a80e-4105-dc67-4b9b10c81f1e}">
+        <p14:section name="도입" id="{f621f04e-f37b-e868-ab9f-09e24396b0b0}">
           <p14:sldIdLst>
             <p14:sldId id="256"/>
             <p14:sldId id="257"/>
           </p14:sldIdLst>
         </p14:section>
-        <p14:section name="개념" id="{892389f9-35e2-ec44-86c9-4845195462fe}">
+        <p14:section name="개념" id="{98378825-a589-12a0-890f-2cd4a72a95b7}">
           <p14:sldIdLst>
             <p14:sldId id="258"/>
             <p14:sldId id="259"/>
             <p14:sldId id="260"/>
           </p14:sldIdLst>
         </p14:section>
-        <p14:section name="연습" id="{30b4df31-2eda-0b49-dfa1-3b6fcaf50a82}">
+        <p14:section name="연습" id="{b8f0a266-a958-9b58-7a36-fca76f01ced8}">
           <p14:sldIdLst>
             <p14:sldId id="261"/>
             <p14:sldId id="262"/>
             <p14:sldId id="263"/>
           </p14:sldIdLst>
         </p14:section>
-        <p14:section name="확인" id="{ec3b16d9-dc48-e9ee-7325-ef2fbe2091f1}">
+        <p14:section name="확인" id="{43b2e5f0-f5ee-b788-6732-0f1363f63657}">
           <p14:sldIdLst>
             <p14:sldId id="264"/>
             <p14:sldId id="265"/>
             <p14:sldId id="266"/>
           </p14:sldIdLst>
         </p14:section>
-        <p14:section name="정리" id="{b2e4d11c-1fc2-2f76-2424-7bf162938f42}">
+        <p14:section name="정리" id="{528acf7b-73b1-3406-9461-82301706747b}">
           <p14:sldIdLst>
             <p14:sldId id="267"/>
           </p14:sldIdLst>
         </p14:section>
-        <p14:section name="보충" id="{d7b084d3-a9dd-841d-0279-e8bc9dabb7ba}">
+        <p14:section name="보충" id="{bc0e774e-6ba6-4222-022b-0045d2cbab33}">
           <p14:sldIdLst>
             <p14:sldId id="268"/>
           </p14:sldIdLst>
